--- a/media/resources/files/Onduktar_BirdenAzTuuraJeKata_dFkVr4r.pptx
+++ b/media/resources/files/Onduktar_BirdenAzTuuraJeKata_dFkVr4r.pptx
@@ -1967,7 +1967,7 @@
                 <a:ea typeface="+mn-ea"/>
                 <a:cs typeface="+mn-cs"/>
               </a:rPr>
-              <a:t>Турдуу пикирлер учун ыраазычылык билдиребиз.</a:t>
+              <a:t>Түрдүү пикирлер үчүн ыраазычылык билдиребиз.</a:t>
             </a:r>
           </a:p>
           <a:p>

--- a/media/resources/files/Onduktar_BirdenAzTuuraJeKata_dFkVr4r.pptx
+++ b/media/resources/files/Onduktar_BirdenAzTuuraJeKata_dFkVr4r.pptx
@@ -3991,7 +3991,7 @@
             <a:pPr algn="ctr"/>
             <a:r>
               <a:rPr lang="en-GB" sz="3200" dirty="0"/>
-              <a:t>7 ÷ 0.1</a:t>
+              <a:t>7 ÷ 0,1</a:t>
             </a:r>
           </a:p>
         </p:txBody>
@@ -4148,7 +4148,7 @@
             <a:pPr algn="ctr"/>
             <a:r>
               <a:rPr lang="en-GB" sz="3200" dirty="0"/>
-              <a:t>6 ÷ 0.2</a:t>
+              <a:t>6 ÷ 0,2</a:t>
             </a:r>
           </a:p>
         </p:txBody>
@@ -4257,7 +4257,7 @@
             <a:pPr algn="ctr"/>
             <a:r>
               <a:rPr lang="en-GB" sz="3200" dirty="0"/>
-              <a:t>2.4 ÷ 0.2</a:t>
+              <a:t>2,4 ÷ 0,2</a:t>
             </a:r>
           </a:p>
         </p:txBody>
@@ -4366,7 +4366,7 @@
             <a:pPr algn="ctr"/>
             <a:r>
               <a:rPr lang="en-GB" sz="3200" dirty="0"/>
-              <a:t>12 ÷ 0.6 = 120 ÷ 6 = 20</a:t>
+              <a:t>12 ÷ 0,6 = 120 ÷ 6 = 20</a:t>
             </a:r>
           </a:p>
         </p:txBody>
@@ -4402,7 +4402,7 @@
             <a:pPr algn="ctr"/>
             <a:r>
               <a:rPr lang="en-GB" sz="3200" dirty="0"/>
-              <a:t>9 ÷ 0.5</a:t>
+              <a:t>9 ÷ 0,5</a:t>
             </a:r>
           </a:p>
         </p:txBody>
@@ -4511,7 +4511,7 @@
             <a:pPr algn="ctr"/>
             <a:r>
               <a:rPr lang="en-GB" sz="3200" dirty="0"/>
-              <a:t>4 ÷ 0.5 = 400 ÷ 5</a:t>
+              <a:t>4 ÷ 0,5 = 400 ÷ 5</a:t>
             </a:r>
           </a:p>
         </p:txBody>
@@ -4547,7 +4547,7 @@
             <a:pPr algn="ctr"/>
             <a:r>
               <a:rPr lang="en-GB" sz="3200" dirty="0"/>
-              <a:t>4 ÷ 0.8 = 5</a:t>
+              <a:t>4 ÷ 0,8 = 5</a:t>
             </a:r>
           </a:p>
         </p:txBody>
@@ -4583,7 +4583,7 @@
             <a:pPr algn="ctr"/>
             <a:r>
               <a:rPr lang="en-GB" sz="3200" dirty="0"/>
-              <a:t>36 ÷ 0.9 = 400</a:t>
+              <a:t>36 ÷ 0,9 = 400</a:t>
             </a:r>
           </a:p>
         </p:txBody>
@@ -4619,7 +4619,7 @@
             <a:pPr algn="ctr"/>
             <a:r>
               <a:rPr lang="en-GB" sz="3200" dirty="0"/>
-              <a:t>2 ÷ 0.25 = 200 ÷ 25 = 8 </a:t>
+              <a:t>2 ÷ 0,25 = 200 ÷ 25 = 8 </a:t>
             </a:r>
           </a:p>
         </p:txBody>
@@ -4655,7 +4655,7 @@
             <a:pPr algn="ctr"/>
             <a:r>
               <a:rPr lang="en-GB" sz="3200" dirty="0"/>
-              <a:t>15 ÷ 0.01 = 150</a:t>
+              <a:t>15 ÷ 0,01 = 150</a:t>
             </a:r>
           </a:p>
         </p:txBody>
@@ -4691,7 +4691,7 @@
             <a:pPr algn="ctr"/>
             <a:r>
               <a:rPr lang="en-GB" sz="3200" dirty="0"/>
-              <a:t>6 ÷ 0.02 = 200</a:t>
+              <a:t>6 ÷ 0,02 = 200</a:t>
             </a:r>
           </a:p>
         </p:txBody>
@@ -4727,7 +4727,7 @@
             <a:pPr algn="ctr"/>
             <a:r>
               <a:rPr lang="en-GB" sz="3200" dirty="0"/>
-              <a:t>5 ÷ 0.2 = 25</a:t>
+              <a:t>5 ÷ 0,2 = 25</a:t>
             </a:r>
           </a:p>
         </p:txBody>
@@ -5434,7 +5434,7 @@
             <a:pPr algn="ctr"/>
             <a:r>
               <a:rPr lang="en-GB" sz="3200" dirty="0"/>
-              <a:t>7 ÷ 0.1</a:t>
+              <a:t>7 ÷ 0,1</a:t>
             </a:r>
           </a:p>
         </p:txBody>
@@ -5661,7 +5661,7 @@
             <a:pPr algn="ctr"/>
             <a:r>
               <a:rPr lang="en-GB" sz="3200" dirty="0"/>
-              <a:t>6 ÷ 0.2</a:t>
+              <a:t>6 ÷ 0,2</a:t>
             </a:r>
           </a:p>
         </p:txBody>
@@ -5770,7 +5770,7 @@
             <a:pPr algn="ctr"/>
             <a:r>
               <a:rPr lang="en-GB" sz="3200" dirty="0"/>
-              <a:t>12 ÷ 0.6 = 120 ÷ 6 = 20</a:t>
+              <a:t>12 ÷ 0,6 = 120 ÷ 6 = 20</a:t>
             </a:r>
           </a:p>
         </p:txBody>
@@ -5806,7 +5806,7 @@
             <a:pPr algn="ctr"/>
             <a:r>
               <a:rPr lang="en-GB" sz="3200" dirty="0"/>
-              <a:t>9 ÷ 0.5</a:t>
+              <a:t>9 ÷ 0,5</a:t>
             </a:r>
           </a:p>
         </p:txBody>
@@ -5915,7 +5915,7 @@
             <a:pPr algn="ctr"/>
             <a:r>
               <a:rPr lang="en-GB" sz="3200" dirty="0"/>
-              <a:t>4 ÷ 0.5 = 400 ÷ 5</a:t>
+              <a:t>4 ÷ 0,5 = 400 ÷ 5</a:t>
             </a:r>
           </a:p>
         </p:txBody>
@@ -6056,7 +6056,7 @@
             <a:pPr algn="ctr"/>
             <a:r>
               <a:rPr lang="en-GB" sz="3200" dirty="0"/>
-              <a:t>5 ÷ 0.2 = 25</a:t>
+              <a:t>5 ÷ 0,2 = 25</a:t>
             </a:r>
           </a:p>
         </p:txBody>
@@ -7454,7 +7454,7 @@
             <a:pPr algn="ctr"/>
             <a:r>
               <a:rPr lang="en-GB" sz="3200" dirty="0"/>
-              <a:t>7 ÷ 0.1</a:t>
+              <a:t>7 ÷ 0,1</a:t>
             </a:r>
           </a:p>
         </p:txBody>
@@ -7681,7 +7681,7 @@
             <a:pPr algn="ctr"/>
             <a:r>
               <a:rPr lang="en-GB" sz="3200" dirty="0"/>
-              <a:t>6 ÷ 0.2</a:t>
+              <a:t>6 ÷ 0,2</a:t>
             </a:r>
           </a:p>
         </p:txBody>
@@ -7794,7 +7794,7 @@
             <a:pPr algn="ctr"/>
             <a:r>
               <a:rPr lang="en-GB" sz="3200" dirty="0"/>
-              <a:t>2.4 ÷ 0.2</a:t>
+              <a:t>2,4 ÷ 0,2</a:t>
             </a:r>
           </a:p>
         </p:txBody>
@@ -7903,7 +7903,7 @@
             <a:pPr algn="ctr"/>
             <a:r>
               <a:rPr lang="en-GB" sz="3200" dirty="0"/>
-              <a:t>12 ÷ 0.6 = 120 ÷ 6 = 20</a:t>
+              <a:t>12 ÷ 0,6 = 120 ÷ 6 = 20</a:t>
             </a:r>
           </a:p>
         </p:txBody>
@@ -7939,7 +7939,7 @@
             <a:pPr algn="ctr"/>
             <a:r>
               <a:rPr lang="en-GB" sz="3200" dirty="0"/>
-              <a:t>9 ÷ 0.5</a:t>
+              <a:t>9 ÷ 0,5</a:t>
             </a:r>
           </a:p>
         </p:txBody>
@@ -8048,7 +8048,7 @@
             <a:pPr algn="ctr"/>
             <a:r>
               <a:rPr lang="en-GB" sz="3200" dirty="0"/>
-              <a:t>4 ÷ 0.5 = 400 ÷ 5</a:t>
+              <a:t>4 ÷ 0,5 = 400 ÷ 5</a:t>
             </a:r>
           </a:p>
         </p:txBody>
@@ -8084,7 +8084,7 @@
             <a:pPr algn="ctr"/>
             <a:r>
               <a:rPr lang="en-GB" sz="3200" dirty="0"/>
-              <a:t>4 ÷ 0.8 = 5</a:t>
+              <a:t>4 ÷ 0,8 = 5</a:t>
             </a:r>
           </a:p>
         </p:txBody>
@@ -8120,7 +8120,7 @@
             <a:pPr algn="ctr"/>
             <a:r>
               <a:rPr lang="en-GB" sz="3200" dirty="0"/>
-              <a:t>36 ÷ 0.9 = 400</a:t>
+              <a:t>36 ÷ 0,9 = 400</a:t>
             </a:r>
           </a:p>
         </p:txBody>
@@ -8156,7 +8156,7 @@
             <a:pPr algn="ctr"/>
             <a:r>
               <a:rPr lang="en-GB" sz="3200" dirty="0"/>
-              <a:t>2 ÷ 0.25 = 200 ÷ 25 = 8 </a:t>
+              <a:t>2 ÷ 0,25 = 200 ÷ 25 = 8 </a:t>
             </a:r>
           </a:p>
         </p:txBody>
@@ -8192,7 +8192,7 @@
             <a:pPr algn="ctr"/>
             <a:r>
               <a:rPr lang="en-GB" sz="3200" dirty="0"/>
-              <a:t>15 ÷ 0.01 = 150</a:t>
+              <a:t>15 ÷ 0,01 = 150</a:t>
             </a:r>
           </a:p>
         </p:txBody>
@@ -8473,7 +8473,7 @@
             <a:pPr algn="ctr"/>
             <a:r>
               <a:rPr lang="en-GB" sz="3200" dirty="0"/>
-              <a:t>6 ÷ 0.02 = 200</a:t>
+              <a:t>6 ÷ 0,02 = 200</a:t>
             </a:r>
           </a:p>
         </p:txBody>
@@ -8509,7 +8509,7 @@
             <a:pPr algn="ctr"/>
             <a:r>
               <a:rPr lang="en-GB" sz="3200" dirty="0"/>
-              <a:t>5 ÷ 0.2 = 25</a:t>
+              <a:t>5 ÷ 0,2 = 25</a:t>
             </a:r>
           </a:p>
         </p:txBody>
@@ -9912,7 +9912,7 @@
             <a:pPr algn="ctr"/>
             <a:r>
               <a:rPr lang="en-GB" sz="3200" dirty="0"/>
-              <a:t>7 ÷ 0.1</a:t>
+              <a:t>7 ÷ 0,1</a:t>
             </a:r>
           </a:p>
         </p:txBody>
@@ -10139,7 +10139,7 @@
             <a:pPr algn="ctr"/>
             <a:r>
               <a:rPr lang="en-GB" sz="3200" dirty="0"/>
-              <a:t>6 ÷ 0.2</a:t>
+              <a:t>6 ÷ 0,2</a:t>
             </a:r>
           </a:p>
         </p:txBody>
@@ -10248,7 +10248,7 @@
             <a:pPr algn="ctr"/>
             <a:r>
               <a:rPr lang="en-GB" sz="3200" dirty="0"/>
-              <a:t>2.4 ÷ 0.2</a:t>
+              <a:t>2,4 ÷ 0,2</a:t>
             </a:r>
           </a:p>
         </p:txBody>
@@ -10357,7 +10357,7 @@
             <a:pPr algn="ctr"/>
             <a:r>
               <a:rPr lang="en-GB" sz="3200" dirty="0"/>
-              <a:t>12 ÷ 0.6 = 120 ÷ 6 = 20</a:t>
+              <a:t>12 ÷ 0,6 = 120 ÷ 6 = 20</a:t>
             </a:r>
           </a:p>
         </p:txBody>
@@ -10393,7 +10393,7 @@
             <a:pPr algn="ctr"/>
             <a:r>
               <a:rPr lang="en-GB" sz="3200" dirty="0"/>
-              <a:t>9 ÷ 0.5</a:t>
+              <a:t>9 ÷ 0,5</a:t>
             </a:r>
           </a:p>
         </p:txBody>
@@ -10502,7 +10502,7 @@
             <a:pPr algn="ctr"/>
             <a:r>
               <a:rPr lang="en-GB" sz="3200" dirty="0"/>
-              <a:t>4 ÷ 0.5 = 400 ÷ 5</a:t>
+              <a:t>4 ÷ 0,5 = 400 ÷ 5</a:t>
             </a:r>
           </a:p>
         </p:txBody>
@@ -10538,7 +10538,7 @@
             <a:pPr algn="ctr"/>
             <a:r>
               <a:rPr lang="en-GB" sz="3200" dirty="0"/>
-              <a:t>4 ÷ 0.8 = 5</a:t>
+              <a:t>4 ÷ 0,8 = 5</a:t>
             </a:r>
           </a:p>
         </p:txBody>
@@ -10574,7 +10574,7 @@
             <a:pPr algn="ctr"/>
             <a:r>
               <a:rPr lang="en-GB" sz="3200" dirty="0"/>
-              <a:t>36 ÷ 0.9 = 400</a:t>
+              <a:t>36 ÷ 0,9 = 400</a:t>
             </a:r>
           </a:p>
         </p:txBody>
@@ -10610,7 +10610,7 @@
             <a:pPr algn="ctr"/>
             <a:r>
               <a:rPr lang="en-GB" sz="3200" dirty="0"/>
-              <a:t>2 ÷ 0.25 = 200 ÷ 25 = 8 </a:t>
+              <a:t>2 ÷ 0,25 = 200 ÷ 25 = 8 </a:t>
             </a:r>
           </a:p>
         </p:txBody>
@@ -10646,7 +10646,7 @@
             <a:pPr algn="ctr"/>
             <a:r>
               <a:rPr lang="en-GB" sz="3200" dirty="0"/>
-              <a:t>15 ÷ 0.01 = 150</a:t>
+              <a:t>15 ÷ 0,01 = 150</a:t>
             </a:r>
           </a:p>
         </p:txBody>
@@ -10927,7 +10927,7 @@
             <a:pPr algn="ctr"/>
             <a:r>
               <a:rPr lang="en-GB" sz="3200" dirty="0"/>
-              <a:t>6 ÷ 0.02 = 200</a:t>
+              <a:t>6 ÷ 0,02 = 200</a:t>
             </a:r>
           </a:p>
         </p:txBody>
@@ -11006,7 +11006,7 @@
             <a:pPr algn="ctr"/>
             <a:r>
               <a:rPr lang="en-GB" sz="3200" dirty="0"/>
-              <a:t>5 ÷ 0.2 = 25</a:t>
+              <a:t>5 ÷ 0,2 = 25</a:t>
             </a:r>
           </a:p>
         </p:txBody>
@@ -12947,7 +12947,7 @@
                 <a:ea typeface="+mn-ea"/>
                 <a:cs typeface="+mn-cs"/>
               </a:rPr>
-              <a:t>7 ÷ 0.1</a:t>
+              <a:t>7 ÷ 0,1</a:t>
             </a:r>
           </a:p>
         </p:txBody>
@@ -13269,7 +13269,7 @@
                 <a:ea typeface="+mn-ea"/>
                 <a:cs typeface="+mn-cs"/>
               </a:rPr>
-              <a:t>6 ÷ 0.2</a:t>
+              <a:t>6 ÷ 0,2</a:t>
             </a:r>
           </a:p>
         </p:txBody>
@@ -13478,7 +13478,7 @@
                 <a:ea typeface="+mn-ea"/>
                 <a:cs typeface="+mn-cs"/>
               </a:rPr>
-              <a:t>2.4 ÷ 0.2</a:t>
+              <a:t>2,4 ÷ 0,2</a:t>
             </a:r>
           </a:p>
         </p:txBody>
@@ -13687,7 +13687,7 @@
                 <a:ea typeface="+mn-ea"/>
                 <a:cs typeface="+mn-cs"/>
               </a:rPr>
-              <a:t>12 ÷ 0.6 = 120 ÷ 6 = 20</a:t>
+              <a:t>12 ÷ 0,6 = 120 ÷ 6 = 20</a:t>
             </a:r>
           </a:p>
         </p:txBody>
@@ -13752,7 +13752,7 @@
                 <a:ea typeface="+mn-ea"/>
                 <a:cs typeface="+mn-cs"/>
               </a:rPr>
-              <a:t>9 ÷ 0.5</a:t>
+              <a:t>9 ÷ 0,5</a:t>
             </a:r>
           </a:p>
         </p:txBody>
@@ -13961,7 +13961,7 @@
                 <a:ea typeface="+mn-ea"/>
                 <a:cs typeface="+mn-cs"/>
               </a:rPr>
-              <a:t>4 ÷ 0.5 = 400 ÷ 5</a:t>
+              <a:t>4 ÷ 0,5 = 400 ÷ 5</a:t>
             </a:r>
           </a:p>
         </p:txBody>
@@ -14026,7 +14026,7 @@
                 <a:ea typeface="+mn-ea"/>
                 <a:cs typeface="+mn-cs"/>
               </a:rPr>
-              <a:t>4 ÷ 0.8 = 5</a:t>
+              <a:t>4 ÷ 0,8 = 5</a:t>
             </a:r>
           </a:p>
         </p:txBody>
@@ -14091,7 +14091,7 @@
                 <a:ea typeface="+mn-ea"/>
                 <a:cs typeface="+mn-cs"/>
               </a:rPr>
-              <a:t>36 ÷ 0.9 = 400</a:t>
+              <a:t>36 ÷ 0,9 = 400</a:t>
             </a:r>
           </a:p>
         </p:txBody>
@@ -14156,7 +14156,7 @@
                 <a:ea typeface="+mn-ea"/>
                 <a:cs typeface="+mn-cs"/>
               </a:rPr>
-              <a:t>2 ÷ 0.25 = 200 ÷ 25 = 8 </a:t>
+              <a:t>2 ÷ 0,25 = 200 ÷ 25 = 8 </a:t>
             </a:r>
           </a:p>
         </p:txBody>
@@ -14221,7 +14221,7 @@
                 <a:ea typeface="+mn-ea"/>
                 <a:cs typeface="+mn-cs"/>
               </a:rPr>
-              <a:t>15 ÷ 0.01 = 150</a:t>
+              <a:t>15 ÷ 0,01 = 150</a:t>
             </a:r>
           </a:p>
         </p:txBody>
@@ -14286,7 +14286,7 @@
                 <a:ea typeface="+mn-ea"/>
                 <a:cs typeface="+mn-cs"/>
               </a:rPr>
-              <a:t>6 ÷ 0.02 = 200</a:t>
+              <a:t>6 ÷ 0,02 = 200</a:t>
             </a:r>
           </a:p>
         </p:txBody>
@@ -14351,7 +14351,7 @@
                 <a:ea typeface="+mn-ea"/>
                 <a:cs typeface="+mn-cs"/>
               </a:rPr>
-              <a:t>5 ÷ 0.2 = 25</a:t>
+              <a:t>5 ÷ 0,2 = 25</a:t>
             </a:r>
           </a:p>
         </p:txBody>
